--- a/AdaptLearn-海報-A1-v2.pptx
+++ b/AdaptLearn-海報-A1-v2.pptx
@@ -1714,8 +1714,8 @@
         </p:nvSpPr>
         <p:spPr>
           <a:xfrm>
-            <a:off x="1371600" y="20665440"/>
-            <a:ext cx="9144000" cy="548640"/>
+            <a:off x="1371600" y="20528280"/>
+            <a:ext cx="12801600" cy="594360"/>
           </a:xfrm>
           <a:prstGeom prst="rect">
             <a:avLst/>
@@ -1731,17 +1731,17 @@
               <a:buNone/>
             </a:pPr>
             <a:r>
-              <a:rPr lang="en-US" sz="2200" b="1" dirty="0">
-                <a:solidFill>
-                  <a:srgbClr val="BFD6C4"/>
-                </a:solidFill>
-                <a:latin typeface="Microsoft JhengHei" pitchFamily="34" charset="0"/>
-                <a:ea typeface="Microsoft JhengHei" pitchFamily="34" charset="-122"/>
-                <a:cs typeface="Microsoft JhengHei" pitchFamily="34" charset="-120"/>
-              </a:rPr>
-              <a:t>這不是實驗數據，是我自己。</a:t>
-            </a:r>
-            <a:endParaRPr lang="en-US" sz="2200" dirty="0"/>
+              <a:rPr lang="en-US" sz="2800" b="1" dirty="0">
+                <a:solidFill>
+                  <a:srgbClr val="FFFFFF"/>
+                </a:solidFill>
+                <a:latin typeface="Microsoft JhengHei" pitchFamily="34" charset="0"/>
+                <a:ea typeface="Microsoft JhengHei" pitchFamily="34" charset="-122"/>
+                <a:cs typeface="Microsoft JhengHei" pitchFamily="34" charset="-120"/>
+              </a:rPr>
+              <a:t>28 頁手寫講義丟進去，63 個概念自己長出來</a:t>
+            </a:r>
+            <a:endParaRPr lang="en-US" sz="2800" dirty="0"/>
           </a:p>
         </p:txBody>
       </p:sp>
@@ -1753,8 +1753,8 @@
         </p:nvSpPr>
         <p:spPr>
           <a:xfrm>
-            <a:off x="1371600" y="21259800"/>
-            <a:ext cx="5486400" cy="384048"/>
+            <a:off x="14630400" y="20574000"/>
+            <a:ext cx="5394960" cy="502920"/>
           </a:xfrm>
           <a:prstGeom prst="rect">
             <a:avLst/>
@@ -1766,34 +1766,58 @@
           <a:bodyPr wrap="square" lIns="0" tIns="0" rIns="0" bIns="0" rtlCol="0" anchor="ctr"/>
           <a:lstStyle/>
           <a:p>
-            <a:pPr indent="0" marL="0">
-              <a:buNone/>
-            </a:pPr>
-            <a:r>
-              <a:rPr lang="en-US" sz="1600" dirty="0">
-                <a:solidFill>
-                  <a:srgbClr val="7E9186"/>
-                </a:solidFill>
-                <a:latin typeface="Microsoft JhengHei" pitchFamily="34" charset="0"/>
-                <a:ea typeface="Microsoft JhengHei" pitchFamily="34" charset="-122"/>
-                <a:cs typeface="Microsoft JhengHei" pitchFamily="34" charset="-120"/>
-              </a:rPr>
-              <a:t>班級排名</a:t>
-            </a:r>
-            <a:endParaRPr lang="en-US" sz="1600" dirty="0"/>
-          </a:p>
-        </p:txBody>
-      </p:sp>
-      <p:sp>
-        <p:nvSpPr>
-          <p:cNvPr id="24" name="Text 20"/>
-          <p:cNvSpPr/>
-          <p:nvPr/>
-        </p:nvSpPr>
-        <p:spPr>
-          <a:xfrm>
-            <a:off x="1371600" y="21579840"/>
-            <a:ext cx="2651760" cy="1920240"/>
+            <a:pPr algn="r" indent="0" marL="0">
+              <a:buNone/>
+            </a:pPr>
+            <a:r>
+              <a:rPr lang="en-US" sz="1500" dirty="0">
+                <a:solidFill>
+                  <a:srgbClr val="8FA396"/>
+                </a:solidFill>
+                <a:latin typeface="Microsoft JhengHei" pitchFamily="34" charset="0"/>
+                <a:ea typeface="Microsoft JhengHei" pitchFamily="34" charset="-122"/>
+                <a:cs typeface="Microsoft JhengHei" pitchFamily="34" charset="-120"/>
+              </a:rPr>
+              <a:t>輸入是我上課抄的筆記，不是打好字的講義。</a:t>
+            </a:r>
+            <a:endParaRPr lang="en-US" sz="1500" dirty="0"/>
+          </a:p>
+        </p:txBody>
+      </p:sp>
+      <p:pic>
+        <p:nvPicPr>
+          <p:cNvPr id="24" name="Image 2" descr="/private/tmp/claude-501/-Users-petertsai-Documents-project/dcb9bd40-99d5-4e0e-9913-d6e32ff3b206/scratchpad/shots/hand.png">    </p:cNvPr>
+          <p:cNvPicPr>
+            <a:picLocks noChangeAspect="1"/>
+          </p:cNvPicPr>
+          <p:nvPr/>
+        </p:nvPicPr>
+        <p:blipFill>
+          <a:blip r:embed="rId3"/>
+          <a:stretch>
+            <a:fillRect/>
+          </a:stretch>
+        </p:blipFill>
+        <p:spPr>
+          <a:xfrm>
+            <a:off x="1371600" y="21351240"/>
+            <a:ext cx="2093976" cy="1920240"/>
+          </a:xfrm>
+          <a:prstGeom prst="rect">
+            <a:avLst/>
+          </a:prstGeom>
+        </p:spPr>
+      </p:pic>
+      <p:sp>
+        <p:nvSpPr>
+          <p:cNvPr id="25" name="Text 20"/>
+          <p:cNvSpPr/>
+          <p:nvPr/>
+        </p:nvSpPr>
+        <p:spPr>
+          <a:xfrm>
+            <a:off x="1097280" y="23317200"/>
+            <a:ext cx="2642616" cy="320040"/>
           </a:xfrm>
           <a:prstGeom prst="rect">
             <a:avLst/>
@@ -1809,30 +1833,30 @@
               <a:buNone/>
             </a:pPr>
             <a:r>
-              <a:rPr lang="en-US" sz="11800" b="1" dirty="0">
-                <a:solidFill>
-                  <a:srgbClr val="6E8375"/>
-                </a:solidFill>
-                <a:latin typeface="Microsoft JhengHei" pitchFamily="34" charset="0"/>
-                <a:ea typeface="Microsoft JhengHei" pitchFamily="34" charset="-122"/>
-                <a:cs typeface="Microsoft JhengHei" pitchFamily="34" charset="-120"/>
-              </a:rPr>
-              <a:t>22</a:t>
-            </a:r>
-            <a:endParaRPr lang="en-US" sz="11800" dirty="0"/>
-          </a:p>
-        </p:txBody>
-      </p:sp>
-      <p:sp>
-        <p:nvSpPr>
-          <p:cNvPr id="25" name="Text 21"/>
-          <p:cNvSpPr/>
-          <p:nvPr/>
-        </p:nvSpPr>
-        <p:spPr>
-          <a:xfrm>
-            <a:off x="4023360" y="21579840"/>
-            <a:ext cx="1280160" cy="1920240"/>
+              <a:rPr lang="en-US" sz="1200" dirty="0">
+                <a:solidFill>
+                  <a:srgbClr val="8FA396"/>
+                </a:solidFill>
+                <a:latin typeface="Microsoft JhengHei" pitchFamily="34" charset="0"/>
+                <a:ea typeface="Microsoft JhengHei" pitchFamily="34" charset="-122"/>
+                <a:cs typeface="Microsoft JhengHei" pitchFamily="34" charset="-120"/>
+              </a:rPr>
+              <a:t>手寫筆記　線性代數 8-1~8-3</a:t>
+            </a:r>
+            <a:endParaRPr lang="en-US" sz="1200" dirty="0"/>
+          </a:p>
+        </p:txBody>
+      </p:sp>
+      <p:sp>
+        <p:nvSpPr>
+          <p:cNvPr id="26" name="Text 21"/>
+          <p:cNvSpPr/>
+          <p:nvPr/>
+        </p:nvSpPr>
+        <p:spPr>
+          <a:xfrm>
+            <a:off x="3465576" y="21991320"/>
+            <a:ext cx="603504" cy="640080"/>
           </a:xfrm>
           <a:prstGeom prst="rect">
             <a:avLst/>
@@ -1848,7 +1872,7 @@
               <a:buNone/>
             </a:pPr>
             <a:r>
-              <a:rPr lang="en-US" sz="5400" dirty="0">
+              <a:rPr lang="en-US" sz="3000" dirty="0">
                 <a:solidFill>
                   <a:srgbClr val="5C6F63"/>
                 </a:solidFill>
@@ -1858,203 +1882,24 @@
               </a:rPr>
               <a:t>→</a:t>
             </a:r>
-            <a:endParaRPr lang="en-US" sz="5400" dirty="0"/>
-          </a:p>
-        </p:txBody>
-      </p:sp>
-      <p:sp>
-        <p:nvSpPr>
-          <p:cNvPr id="26" name="Text 22"/>
-          <p:cNvSpPr/>
-          <p:nvPr/>
-        </p:nvSpPr>
-        <p:spPr>
-          <a:xfrm>
-            <a:off x="5303520" y="21579840"/>
-            <a:ext cx="2651760" cy="1920240"/>
-          </a:xfrm>
-          <a:prstGeom prst="rect">
-            <a:avLst/>
-          </a:prstGeom>
-          <a:noFill/>
-          <a:ln/>
-        </p:spPr>
-        <p:txBody>
-          <a:bodyPr wrap="square" lIns="0" tIns="0" rIns="0" bIns="0" rtlCol="0" anchor="ctr"/>
-          <a:lstStyle/>
-          <a:p>
-            <a:pPr algn="ctr" indent="0" marL="0">
-              <a:buNone/>
-            </a:pPr>
-            <a:r>
-              <a:rPr lang="en-US" sz="11800" b="1" dirty="0">
-                <a:solidFill>
-                  <a:srgbClr val="FFFFFF"/>
-                </a:solidFill>
-                <a:latin typeface="Microsoft JhengHei" pitchFamily="34" charset="0"/>
-                <a:ea typeface="Microsoft JhengHei" pitchFamily="34" charset="-122"/>
-                <a:cs typeface="Microsoft JhengHei" pitchFamily="34" charset="-120"/>
-              </a:rPr>
-              <a:t>10</a:t>
-            </a:r>
-            <a:endParaRPr lang="en-US" sz="11800" dirty="0"/>
-          </a:p>
-        </p:txBody>
-      </p:sp>
-      <p:sp>
-        <p:nvSpPr>
-          <p:cNvPr id="27" name="Text 23"/>
-          <p:cNvSpPr/>
-          <p:nvPr/>
-        </p:nvSpPr>
-        <p:spPr>
-          <a:xfrm>
-            <a:off x="1371600" y="23426928"/>
-            <a:ext cx="2651760" cy="365760"/>
-          </a:xfrm>
-          <a:prstGeom prst="rect">
-            <a:avLst/>
-          </a:prstGeom>
-          <a:noFill/>
-          <a:ln/>
-        </p:spPr>
-        <p:txBody>
-          <a:bodyPr wrap="square" lIns="0" tIns="0" rIns="0" bIns="0" rtlCol="0" anchor="ctr"/>
-          <a:lstStyle/>
-          <a:p>
-            <a:pPr algn="ctr" indent="0" marL="0">
-              <a:buNone/>
-            </a:pPr>
-            <a:r>
-              <a:rPr lang="en-US" sz="1400" dirty="0">
-                <a:solidFill>
-                  <a:srgbClr val="7E9186"/>
-                </a:solidFill>
-                <a:latin typeface="Microsoft JhengHei" pitchFamily="34" charset="0"/>
-                <a:ea typeface="Microsoft JhengHei" pitchFamily="34" charset="-122"/>
-                <a:cs typeface="Microsoft JhengHei" pitchFamily="34" charset="-120"/>
-              </a:rPr>
-              <a:t>上學期 22 / 51</a:t>
-            </a:r>
-            <a:endParaRPr lang="en-US" sz="1400" dirty="0"/>
-          </a:p>
-        </p:txBody>
-      </p:sp>
-      <p:sp>
-        <p:nvSpPr>
-          <p:cNvPr id="28" name="Text 24"/>
-          <p:cNvSpPr/>
-          <p:nvPr/>
-        </p:nvSpPr>
-        <p:spPr>
-          <a:xfrm>
-            <a:off x="5303520" y="23426928"/>
-            <a:ext cx="2651760" cy="365760"/>
-          </a:xfrm>
-          <a:prstGeom prst="rect">
-            <a:avLst/>
-          </a:prstGeom>
-          <a:noFill/>
-          <a:ln/>
-        </p:spPr>
-        <p:txBody>
-          <a:bodyPr wrap="square" lIns="0" tIns="0" rIns="0" bIns="0" rtlCol="0" anchor="ctr"/>
-          <a:lstStyle/>
-          <a:p>
-            <a:pPr algn="ctr" indent="0" marL="0">
-              <a:buNone/>
-            </a:pPr>
-            <a:r>
-              <a:rPr lang="en-US" sz="1400" b="1" dirty="0">
-                <a:solidFill>
-                  <a:srgbClr val="BFD6C4"/>
-                </a:solidFill>
-                <a:latin typeface="Microsoft JhengHei" pitchFamily="34" charset="0"/>
-                <a:ea typeface="Microsoft JhengHei" pitchFamily="34" charset="-122"/>
-                <a:cs typeface="Microsoft JhengHei" pitchFamily="34" charset="-120"/>
-              </a:rPr>
-              <a:t>本學期 第 10 名</a:t>
-            </a:r>
-            <a:endParaRPr lang="en-US" sz="1400" dirty="0"/>
-          </a:p>
-        </p:txBody>
-      </p:sp>
-      <p:sp>
-        <p:nvSpPr>
-          <p:cNvPr id="29" name="Text 25"/>
-          <p:cNvSpPr/>
-          <p:nvPr/>
-        </p:nvSpPr>
-        <p:spPr>
-          <a:xfrm>
-            <a:off x="9052560" y="20985480"/>
-            <a:ext cx="10972800" cy="1371600"/>
-          </a:xfrm>
-          <a:prstGeom prst="rect">
-            <a:avLst/>
-          </a:prstGeom>
-          <a:noFill/>
-          <a:ln/>
-        </p:spPr>
-        <p:txBody>
-          <a:bodyPr wrap="square" lIns="0" tIns="0" rIns="0" bIns="0" rtlCol="0" anchor="t"/>
-          <a:lstStyle/>
-          <a:p>
-            <a:pPr indent="0" marL="0">
-              <a:lnSpc>
-                <a:spcPts val="3000"/>
-              </a:lnSpc>
-              <a:buNone/>
-            </a:pPr>
-            <a:r>
-              <a:rPr lang="en-US" sz="1700" dirty="0">
-                <a:solidFill>
-                  <a:srgbClr val="D6E4D9"/>
-                </a:solidFill>
-                <a:latin typeface="Microsoft JhengHei" pitchFamily="34" charset="0"/>
-                <a:ea typeface="Microsoft JhengHei" pitchFamily="34" charset="-122"/>
-                <a:cs typeface="Microsoft JhengHei" pitchFamily="34" charset="-120"/>
-              </a:rPr>
-              <a:t>期末考前三週，我先用診斷測驗找出弱點概念，再照「今晚該讀什麼」與遺忘曲線排程複習，</a:t>
-            </a:r>
-            <a:endParaRPr lang="en-US" sz="1700" dirty="0"/>
-          </a:p>
-          <a:p>
-            <a:pPr indent="0" marL="0">
-              <a:lnSpc>
-                <a:spcPts val="3000"/>
-              </a:lnSpc>
-              <a:buNone/>
-            </a:pPr>
-            <a:r>
-              <a:rPr lang="en-US" sz="1700" dirty="0">
-                <a:solidFill>
-                  <a:srgbClr val="D6E4D9"/>
-                </a:solidFill>
-                <a:latin typeface="Microsoft JhengHei" pitchFamily="34" charset="0"/>
-                <a:ea typeface="Microsoft JhengHei" pitchFamily="34" charset="-122"/>
-                <a:cs typeface="Microsoft JhengHei" pitchFamily="34" charset="-120"/>
-              </a:rPr>
-              <a:t>把有限的時間集中在最需要的概念上。工程數學、演算法、訊號與系統、資料探勘四科皆 90 分以上。</a:t>
-            </a:r>
-            <a:endParaRPr lang="en-US" sz="1700" dirty="0"/>
-          </a:p>
-        </p:txBody>
-      </p:sp>
-      <p:sp>
-        <p:nvSpPr>
-          <p:cNvPr id="30" name="Shape 26"/>
-          <p:cNvSpPr/>
-          <p:nvPr/>
-        </p:nvSpPr>
-        <p:spPr>
-          <a:xfrm>
-            <a:off x="9052560" y="22494240"/>
-            <a:ext cx="10972800" cy="1325880"/>
+            <a:endParaRPr lang="en-US" sz="3000" dirty="0"/>
+          </a:p>
+        </p:txBody>
+      </p:sp>
+      <p:sp>
+        <p:nvSpPr>
+          <p:cNvPr id="27" name="Shape 22"/>
+          <p:cNvSpPr/>
+          <p:nvPr/>
+        </p:nvSpPr>
+        <p:spPr>
+          <a:xfrm>
+            <a:off x="4069080" y="21442680"/>
+            <a:ext cx="4023360" cy="1737360"/>
           </a:xfrm>
           <a:prstGeom prst="roundRect">
             <a:avLst>
-              <a:gd name="adj" fmla="val 10345"/>
+              <a:gd name="adj" fmla="val 7895"/>
             </a:avLst>
           </a:prstGeom>
           <a:solidFill>
@@ -2070,14 +1915,14 @@
       </p:sp>
       <p:sp>
         <p:nvSpPr>
-          <p:cNvPr id="31" name="Text 27"/>
-          <p:cNvSpPr/>
-          <p:nvPr/>
-        </p:nvSpPr>
-        <p:spPr>
-          <a:xfrm>
-            <a:off x="9418320" y="22494240"/>
-            <a:ext cx="10241280" cy="1325880"/>
+          <p:cNvPr id="28" name="Text 23"/>
+          <p:cNvSpPr/>
+          <p:nvPr/>
+        </p:nvSpPr>
+        <p:spPr>
+          <a:xfrm>
+            <a:off x="4343400" y="21671280"/>
+            <a:ext cx="3474720" cy="411480"/>
           </a:xfrm>
           <a:prstGeom prst="rect">
             <a:avLst/>
@@ -2090,36 +1935,95 @@
           <a:lstStyle/>
           <a:p>
             <a:pPr indent="0" marL="0">
+              <a:buNone/>
+            </a:pPr>
+            <a:r>
+              <a:rPr lang="en-US" sz="1800" b="1" dirty="0">
+                <a:solidFill>
+                  <a:srgbClr val="FFFFFF"/>
+                </a:solidFill>
+                <a:latin typeface="Microsoft JhengHei" pitchFamily="34" charset="0"/>
+                <a:ea typeface="Microsoft JhengHei" pitchFamily="34" charset="-122"/>
+                <a:cs typeface="Microsoft JhengHei" pitchFamily="34" charset="-120"/>
+              </a:rPr>
+              <a:t>在我的電腦上做 OCR</a:t>
+            </a:r>
+            <a:endParaRPr lang="en-US" sz="1800" dirty="0"/>
+          </a:p>
+        </p:txBody>
+      </p:sp>
+      <p:sp>
+        <p:nvSpPr>
+          <p:cNvPr id="29" name="Text 24"/>
+          <p:cNvSpPr/>
+          <p:nvPr/>
+        </p:nvSpPr>
+        <p:spPr>
+          <a:xfrm>
+            <a:off x="4343400" y="22128480"/>
+            <a:ext cx="3474720" cy="914400"/>
+          </a:xfrm>
+          <a:prstGeom prst="rect">
+            <a:avLst/>
+          </a:prstGeom>
+          <a:noFill/>
+          <a:ln/>
+        </p:spPr>
+        <p:txBody>
+          <a:bodyPr wrap="square" lIns="0" tIns="0" rIns="0" bIns="0" rtlCol="0" anchor="t"/>
+          <a:lstStyle/>
+          <a:p>
+            <a:pPr indent="0" marL="0">
               <a:lnSpc>
-                <a:spcPts val="2600"/>
+                <a:spcPts val="2100"/>
               </a:lnSpc>
               <a:buNone/>
             </a:pPr>
             <a:r>
-              <a:rPr lang="en-US" sz="1600" dirty="0">
-                <a:solidFill>
-                  <a:srgbClr val="BFD6C4"/>
-                </a:solidFill>
-                <a:latin typeface="Microsoft JhengHei" pitchFamily="34" charset="0"/>
-                <a:ea typeface="Microsoft JhengHei" pitchFamily="34" charset="-122"/>
-                <a:cs typeface="Microsoft JhengHei" pitchFamily="34" charset="-120"/>
-              </a:rPr>
-              <a:t>成績進步受多重因素影響，無法全數歸因於單一工具。但它把「不知道自己哪裡不會」變成「明確的弱點清單與複習時點」。</a:t>
-            </a:r>
-            <a:endParaRPr lang="en-US" sz="1600" dirty="0"/>
-          </a:p>
-        </p:txBody>
-      </p:sp>
-      <p:sp>
-        <p:nvSpPr>
-          <p:cNvPr id="32" name="Text 28"/>
-          <p:cNvSpPr/>
-          <p:nvPr/>
-        </p:nvSpPr>
-        <p:spPr>
-          <a:xfrm>
-            <a:off x="1371600" y="24643080"/>
-            <a:ext cx="18653760" cy="548640"/>
+              <a:rPr lang="en-US" sz="1300" dirty="0">
+                <a:solidFill>
+                  <a:srgbClr val="A8BCAF"/>
+                </a:solidFill>
+                <a:latin typeface="Microsoft JhengHei" pitchFamily="34" charset="0"/>
+                <a:ea typeface="Microsoft JhengHei" pitchFamily="34" charset="-122"/>
+                <a:cs typeface="Microsoft JhengHei" pitchFamily="34" charset="-120"/>
+              </a:rPr>
+              <a:t>Ollama 本機視覺模型打頭陣，後面三層備援。</a:t>
+            </a:r>
+            <a:endParaRPr lang="en-US" sz="1300" dirty="0"/>
+          </a:p>
+          <a:p>
+            <a:pPr indent="0" marL="0">
+              <a:lnSpc>
+                <a:spcPts val="2100"/>
+              </a:lnSpc>
+              <a:buNone/>
+            </a:pPr>
+            <a:r>
+              <a:rPr lang="en-US" sz="1300" dirty="0">
+                <a:solidFill>
+                  <a:srgbClr val="A8BCAF"/>
+                </a:solidFill>
+                <a:latin typeface="Microsoft JhengHei" pitchFamily="34" charset="0"/>
+                <a:ea typeface="Microsoft JhengHei" pitchFamily="34" charset="-122"/>
+                <a:cs typeface="Microsoft JhengHei" pitchFamily="34" charset="-120"/>
+              </a:rPr>
+              <a:t>離線、零 API 成本、資料不外傳。</a:t>
+            </a:r>
+            <a:endParaRPr lang="en-US" sz="1300" dirty="0"/>
+          </a:p>
+        </p:txBody>
+      </p:sp>
+      <p:sp>
+        <p:nvSpPr>
+          <p:cNvPr id="30" name="Text 25"/>
+          <p:cNvSpPr/>
+          <p:nvPr/>
+        </p:nvSpPr>
+        <p:spPr>
+          <a:xfrm>
+            <a:off x="4069080" y="23317200"/>
+            <a:ext cx="4023360" cy="320040"/>
           </a:xfrm>
           <a:prstGeom prst="rect">
             <a:avLst/>
@@ -2131,42 +2035,287 @@
           <a:bodyPr wrap="square" lIns="0" tIns="0" rIns="0" bIns="0" rtlCol="0" anchor="ctr"/>
           <a:lstStyle/>
           <a:p>
-            <a:pPr indent="0" marL="0">
-              <a:buNone/>
-            </a:pPr>
-            <a:r>
-              <a:rPr lang="en-US" sz="2600" b="1" dirty="0">
-                <a:solidFill>
-                  <a:srgbClr val="1A1D1B"/>
-                </a:solidFill>
-                <a:latin typeface="Microsoft JhengHei" pitchFamily="34" charset="0"/>
-                <a:ea typeface="Microsoft JhengHei" pitchFamily="34" charset="-122"/>
-                <a:cs typeface="Microsoft JhengHei" pitchFamily="34" charset="-120"/>
-              </a:rPr>
-              <a:t>卡關歸因不是單獨運作的，它站在另外三個零件上面</a:t>
-            </a:r>
-            <a:endParaRPr lang="en-US" sz="2600" dirty="0"/>
+            <a:pPr algn="ctr" indent="0" marL="0">
+              <a:buNone/>
+            </a:pPr>
+            <a:r>
+              <a:rPr lang="en-US" sz="1200" dirty="0">
+                <a:solidFill>
+                  <a:srgbClr val="8FA396"/>
+                </a:solidFill>
+                <a:latin typeface="Microsoft JhengHei" pitchFamily="34" charset="0"/>
+                <a:ea typeface="Microsoft JhengHei" pitchFamily="34" charset="-122"/>
+                <a:cs typeface="Microsoft JhengHei" pitchFamily="34" charset="-120"/>
+              </a:rPr>
+              <a:t>辨識不出來會明確告警，絕不靜默套模板</a:t>
+            </a:r>
+            <a:endParaRPr lang="en-US" sz="1200" dirty="0"/>
+          </a:p>
+        </p:txBody>
+      </p:sp>
+      <p:sp>
+        <p:nvSpPr>
+          <p:cNvPr id="31" name="Text 26"/>
+          <p:cNvSpPr/>
+          <p:nvPr/>
+        </p:nvSpPr>
+        <p:spPr>
+          <a:xfrm>
+            <a:off x="8092440" y="21991320"/>
+            <a:ext cx="603504" cy="640080"/>
+          </a:xfrm>
+          <a:prstGeom prst="rect">
+            <a:avLst/>
+          </a:prstGeom>
+          <a:noFill/>
+          <a:ln/>
+        </p:spPr>
+        <p:txBody>
+          <a:bodyPr wrap="square" lIns="0" tIns="0" rIns="0" bIns="0" rtlCol="0" anchor="ctr"/>
+          <a:lstStyle/>
+          <a:p>
+            <a:pPr algn="ctr" indent="0" marL="0">
+              <a:buNone/>
+            </a:pPr>
+            <a:r>
+              <a:rPr lang="en-US" sz="3000" dirty="0">
+                <a:solidFill>
+                  <a:srgbClr val="5C6F63"/>
+                </a:solidFill>
+                <a:latin typeface="Microsoft JhengHei" pitchFamily="34" charset="0"/>
+                <a:ea typeface="Microsoft JhengHei" pitchFamily="34" charset="-122"/>
+                <a:cs typeface="Microsoft JhengHei" pitchFamily="34" charset="-120"/>
+              </a:rPr>
+              <a:t>→</a:t>
+            </a:r>
+            <a:endParaRPr lang="en-US" sz="3000" dirty="0"/>
+          </a:p>
+        </p:txBody>
+      </p:sp>
+      <p:sp>
+        <p:nvSpPr>
+          <p:cNvPr id="32" name="Shape 27"/>
+          <p:cNvSpPr/>
+          <p:nvPr/>
+        </p:nvSpPr>
+        <p:spPr>
+          <a:xfrm>
+            <a:off x="8686800" y="21442680"/>
+            <a:ext cx="4023360" cy="1737360"/>
+          </a:xfrm>
+          <a:prstGeom prst="roundRect">
+            <a:avLst>
+              <a:gd name="adj" fmla="val 7895"/>
+            </a:avLst>
+          </a:prstGeom>
+          <a:solidFill>
+            <a:srgbClr val="1E4630"/>
+          </a:solidFill>
+          <a:ln w="15240">
+            <a:solidFill>
+              <a:srgbClr val="2F5C42"/>
+            </a:solidFill>
+            <a:prstDash val="solid"/>
+          </a:ln>
+        </p:spPr>
+      </p:sp>
+      <p:sp>
+        <p:nvSpPr>
+          <p:cNvPr id="33" name="Text 28"/>
+          <p:cNvSpPr/>
+          <p:nvPr/>
+        </p:nvSpPr>
+        <p:spPr>
+          <a:xfrm>
+            <a:off x="8961120" y="21671280"/>
+            <a:ext cx="3474720" cy="411480"/>
+          </a:xfrm>
+          <a:prstGeom prst="rect">
+            <a:avLst/>
+          </a:prstGeom>
+          <a:noFill/>
+          <a:ln/>
+        </p:spPr>
+        <p:txBody>
+          <a:bodyPr wrap="square" lIns="0" tIns="0" rIns="0" bIns="0" rtlCol="0" anchor="ctr"/>
+          <a:lstStyle/>
+          <a:p>
+            <a:pPr indent="0" marL="0">
+              <a:buNone/>
+            </a:pPr>
+            <a:r>
+              <a:rPr lang="en-US" sz="1800" b="1" dirty="0">
+                <a:solidFill>
+                  <a:srgbClr val="FFFFFF"/>
+                </a:solidFill>
+                <a:latin typeface="Microsoft JhengHei" pitchFamily="34" charset="0"/>
+                <a:ea typeface="Microsoft JhengHei" pitchFamily="34" charset="-122"/>
+                <a:cs typeface="Microsoft JhengHei" pitchFamily="34" charset="-120"/>
+              </a:rPr>
+              <a:t>抽出概念與先修關係</a:t>
+            </a:r>
+            <a:endParaRPr lang="en-US" sz="1800" dirty="0"/>
+          </a:p>
+        </p:txBody>
+      </p:sp>
+      <p:sp>
+        <p:nvSpPr>
+          <p:cNvPr id="34" name="Text 29"/>
+          <p:cNvSpPr/>
+          <p:nvPr/>
+        </p:nvSpPr>
+        <p:spPr>
+          <a:xfrm>
+            <a:off x="8961120" y="22128480"/>
+            <a:ext cx="3474720" cy="914400"/>
+          </a:xfrm>
+          <a:prstGeom prst="rect">
+            <a:avLst/>
+          </a:prstGeom>
+          <a:noFill/>
+          <a:ln/>
+        </p:spPr>
+        <p:txBody>
+          <a:bodyPr wrap="square" lIns="0" tIns="0" rIns="0" bIns="0" rtlCol="0" anchor="t"/>
+          <a:lstStyle/>
+          <a:p>
+            <a:pPr indent="0" marL="0">
+              <a:lnSpc>
+                <a:spcPts val="2100"/>
+              </a:lnSpc>
+              <a:buNone/>
+            </a:pPr>
+            <a:r>
+              <a:rPr lang="en-US" sz="1300" dirty="0">
+                <a:solidFill>
+                  <a:srgbClr val="A8BCAF"/>
+                </a:solidFill>
+                <a:latin typeface="Microsoft JhengHei" pitchFamily="34" charset="0"/>
+                <a:ea typeface="Microsoft JhengHei" pitchFamily="34" charset="-122"/>
+                <a:cs typeface="Microsoft JhengHei" pitchFamily="34" charset="-120"/>
+              </a:rPr>
+              <a:t>難的不是抽概念，是抽「誰是誰的先修」。</a:t>
+            </a:r>
+            <a:endParaRPr lang="en-US" sz="1300" dirty="0"/>
+          </a:p>
+          <a:p>
+            <a:pPr indent="0" marL="0">
+              <a:lnSpc>
+                <a:spcPts val="2100"/>
+              </a:lnSpc>
+              <a:buNone/>
+            </a:pPr>
+            <a:r>
+              <a:rPr lang="en-US" sz="1300" dirty="0">
+                <a:solidFill>
+                  <a:srgbClr val="A8BCAF"/>
+                </a:solidFill>
+                <a:latin typeface="Microsoft JhengHei" pitchFamily="34" charset="0"/>
+                <a:ea typeface="Microsoft JhengHei" pitchFamily="34" charset="-122"/>
+                <a:cs typeface="Microsoft JhengHei" pitchFamily="34" charset="-120"/>
+              </a:rPr>
+              <a:t>先修只能指向同一批概念，防止 LLM 亂連。</a:t>
+            </a:r>
+            <a:endParaRPr lang="en-US" sz="1300" dirty="0"/>
+          </a:p>
+        </p:txBody>
+      </p:sp>
+      <p:sp>
+        <p:nvSpPr>
+          <p:cNvPr id="35" name="Text 30"/>
+          <p:cNvSpPr/>
+          <p:nvPr/>
+        </p:nvSpPr>
+        <p:spPr>
+          <a:xfrm>
+            <a:off x="8686800" y="23317200"/>
+            <a:ext cx="4023360" cy="320040"/>
+          </a:xfrm>
+          <a:prstGeom prst="rect">
+            <a:avLst/>
+          </a:prstGeom>
+          <a:noFill/>
+          <a:ln/>
+        </p:spPr>
+        <p:txBody>
+          <a:bodyPr wrap="square" lIns="0" tIns="0" rIns="0" bIns="0" rtlCol="0" anchor="ctr"/>
+          <a:lstStyle/>
+          <a:p>
+            <a:pPr algn="ctr" indent="0" marL="0">
+              <a:buNone/>
+            </a:pPr>
+            <a:r>
+              <a:rPr lang="en-US" sz="1200" dirty="0">
+                <a:solidFill>
+                  <a:srgbClr val="8FA396"/>
+                </a:solidFill>
+                <a:latin typeface="Microsoft JhengHei" pitchFamily="34" charset="0"/>
+                <a:ea typeface="Microsoft JhengHei" pitchFamily="34" charset="-122"/>
+                <a:cs typeface="Microsoft JhengHei" pitchFamily="34" charset="-120"/>
+              </a:rPr>
+              <a:t>概念 ID 決定論生成，同一個概念不會分裂成兩個</a:t>
+            </a:r>
+            <a:endParaRPr lang="en-US" sz="1200" dirty="0"/>
+          </a:p>
+        </p:txBody>
+      </p:sp>
+      <p:sp>
+        <p:nvSpPr>
+          <p:cNvPr id="36" name="Text 31"/>
+          <p:cNvSpPr/>
+          <p:nvPr/>
+        </p:nvSpPr>
+        <p:spPr>
+          <a:xfrm>
+            <a:off x="12710160" y="21991320"/>
+            <a:ext cx="603504" cy="640080"/>
+          </a:xfrm>
+          <a:prstGeom prst="rect">
+            <a:avLst/>
+          </a:prstGeom>
+          <a:noFill/>
+          <a:ln/>
+        </p:spPr>
+        <p:txBody>
+          <a:bodyPr wrap="square" lIns="0" tIns="0" rIns="0" bIns="0" rtlCol="0" anchor="ctr"/>
+          <a:lstStyle/>
+          <a:p>
+            <a:pPr algn="ctr" indent="0" marL="0">
+              <a:buNone/>
+            </a:pPr>
+            <a:r>
+              <a:rPr lang="en-US" sz="3000" dirty="0">
+                <a:solidFill>
+                  <a:srgbClr val="5C6F63"/>
+                </a:solidFill>
+                <a:latin typeface="Microsoft JhengHei" pitchFamily="34" charset="0"/>
+                <a:ea typeface="Microsoft JhengHei" pitchFamily="34" charset="-122"/>
+                <a:cs typeface="Microsoft JhengHei" pitchFamily="34" charset="-120"/>
+              </a:rPr>
+              <a:t>→</a:t>
+            </a:r>
+            <a:endParaRPr lang="en-US" sz="3000" dirty="0"/>
           </a:p>
         </p:txBody>
       </p:sp>
       <p:pic>
         <p:nvPicPr>
-          <p:cNvPr id="33" name="Image 2" descr="/private/tmp/claude-501/-Users-petertsai-Documents-project/dcb9bd40-99d5-4e0e-9913-d6e32ff3b206/scratchpad/shots/02-tree.png">    </p:cNvPr>
+          <p:cNvPr id="37" name="Image 3" descr="/private/tmp/claude-501/-Users-petertsai-Documents-project/dcb9bd40-99d5-4e0e-9913-d6e32ff3b206/scratchpad/shots/02-tree.png">    </p:cNvPr>
           <p:cNvPicPr>
             <a:picLocks noChangeAspect="1"/>
           </p:cNvPicPr>
           <p:nvPr/>
         </p:nvPicPr>
         <p:blipFill>
-          <a:blip r:embed="rId3"/>
+          <a:blip r:embed="rId4"/>
           <a:stretch>
             <a:fillRect/>
           </a:stretch>
         </p:blipFill>
         <p:spPr>
           <a:xfrm>
-            <a:off x="1371600" y="25374600"/>
-            <a:ext cx="10424160" cy="2578608"/>
+            <a:off x="13304520" y="21488400"/>
+            <a:ext cx="6720840" cy="1664208"/>
           </a:xfrm>
           <a:prstGeom prst="rect">
             <a:avLst/>
@@ -2175,13 +2324,154 @@
       </p:pic>
       <p:sp>
         <p:nvSpPr>
-          <p:cNvPr id="34" name="Text 29"/>
-          <p:cNvSpPr/>
-          <p:nvPr/>
-        </p:nvSpPr>
-        <p:spPr>
-          <a:xfrm>
-            <a:off x="1371600" y="27962352"/>
+          <p:cNvPr id="38" name="Text 32"/>
+          <p:cNvSpPr/>
+          <p:nvPr/>
+        </p:nvSpPr>
+        <p:spPr>
+          <a:xfrm>
+            <a:off x="13304520" y="23317200"/>
+            <a:ext cx="6720840" cy="320040"/>
+          </a:xfrm>
+          <a:prstGeom prst="rect">
+            <a:avLst/>
+          </a:prstGeom>
+          <a:noFill/>
+          <a:ln/>
+        </p:spPr>
+        <p:txBody>
+          <a:bodyPr wrap="square" lIns="0" tIns="0" rIns="0" bIns="0" rtlCol="0" anchor="ctr"/>
+          <a:lstStyle/>
+          <a:p>
+            <a:pPr algn="ctr" indent="0" marL="0">
+              <a:buNone/>
+            </a:pPr>
+            <a:r>
+              <a:rPr lang="en-US" sz="1200" dirty="0">
+                <a:solidFill>
+                  <a:srgbClr val="8FA396"/>
+                </a:solidFill>
+                <a:latin typeface="Microsoft JhengHei" pitchFamily="34" charset="0"/>
+                <a:ea typeface="Microsoft JhengHei" pitchFamily="34" charset="-122"/>
+                <a:cs typeface="Microsoft JhengHei" pitchFamily="34" charset="-120"/>
+              </a:rPr>
+              <a:t>一棵可以回溯根因的技能樹</a:t>
+            </a:r>
+            <a:endParaRPr lang="en-US" sz="1200" dirty="0"/>
+          </a:p>
+        </p:txBody>
+      </p:sp>
+      <p:sp>
+        <p:nvSpPr>
+          <p:cNvPr id="39" name="Text 33"/>
+          <p:cNvSpPr/>
+          <p:nvPr/>
+        </p:nvSpPr>
+        <p:spPr>
+          <a:xfrm>
+            <a:off x="1371600" y="23728680"/>
+            <a:ext cx="18653760" cy="411480"/>
+          </a:xfrm>
+          <a:prstGeom prst="rect">
+            <a:avLst/>
+          </a:prstGeom>
+          <a:noFill/>
+          <a:ln/>
+        </p:spPr>
+        <p:txBody>
+          <a:bodyPr wrap="square" lIns="0" tIns="0" rIns="0" bIns="0" rtlCol="0" anchor="ctr"/>
+          <a:lstStyle/>
+          <a:p>
+            <a:pPr indent="0" marL="0">
+              <a:buNone/>
+            </a:pPr>
+            <a:r>
+              <a:rPr lang="en-US" sz="1500" dirty="0">
+                <a:solidFill>
+                  <a:srgbClr val="BFD6C4"/>
+                </a:solidFill>
+                <a:latin typeface="Microsoft JhengHei" pitchFamily="34" charset="0"/>
+                <a:ea typeface="Microsoft JhengHei" pitchFamily="34" charset="-122"/>
+                <a:cs typeface="Microsoft JhengHei" pitchFamily="34" charset="-120"/>
+              </a:rPr>
+              <a:t>這 63 個概念、還有課與課之間的 37 條連結，沒有一個是我手動輸入的 —— 全部由這條管線跑出來。</a:t>
+            </a:r>
+            <a:endParaRPr lang="en-US" sz="1500" dirty="0"/>
+          </a:p>
+        </p:txBody>
+      </p:sp>
+      <p:sp>
+        <p:nvSpPr>
+          <p:cNvPr id="40" name="Text 34"/>
+          <p:cNvSpPr/>
+          <p:nvPr/>
+        </p:nvSpPr>
+        <p:spPr>
+          <a:xfrm>
+            <a:off x="1371600" y="24643080"/>
+            <a:ext cx="18653760" cy="548640"/>
+          </a:xfrm>
+          <a:prstGeom prst="rect">
+            <a:avLst/>
+          </a:prstGeom>
+          <a:noFill/>
+          <a:ln/>
+        </p:spPr>
+        <p:txBody>
+          <a:bodyPr wrap="square" lIns="0" tIns="0" rIns="0" bIns="0" rtlCol="0" anchor="ctr"/>
+          <a:lstStyle/>
+          <a:p>
+            <a:pPr indent="0" marL="0">
+              <a:buNone/>
+            </a:pPr>
+            <a:r>
+              <a:rPr lang="en-US" sz="2600" b="1" dirty="0">
+                <a:solidFill>
+                  <a:srgbClr val="1A1D1B"/>
+                </a:solidFill>
+                <a:latin typeface="Microsoft JhengHei" pitchFamily="34" charset="0"/>
+                <a:ea typeface="Microsoft JhengHei" pitchFamily="34" charset="-122"/>
+                <a:cs typeface="Microsoft JhengHei" pitchFamily="34" charset="-120"/>
+              </a:rPr>
+              <a:t>卡關歸因不是單獨運作的，它站在另外三個零件上面</a:t>
+            </a:r>
+            <a:endParaRPr lang="en-US" sz="2600" dirty="0"/>
+          </a:p>
+        </p:txBody>
+      </p:sp>
+      <p:pic>
+        <p:nvPicPr>
+          <p:cNvPr id="41" name="Image 4" descr="/private/tmp/claude-501/-Users-petertsai-Documents-project/dcb9bd40-99d5-4e0e-9913-d6e32ff3b206/scratchpad/shots/04-crosscourse.png">    </p:cNvPr>
+          <p:cNvPicPr>
+            <a:picLocks noChangeAspect="1"/>
+          </p:cNvPicPr>
+          <p:nvPr/>
+        </p:nvPicPr>
+        <p:blipFill>
+          <a:blip r:embed="rId5"/>
+          <a:stretch>
+            <a:fillRect/>
+          </a:stretch>
+        </p:blipFill>
+        <p:spPr>
+          <a:xfrm>
+            <a:off x="1371600" y="25511760"/>
+            <a:ext cx="10424160" cy="2331720"/>
+          </a:xfrm>
+          <a:prstGeom prst="rect">
+            <a:avLst/>
+          </a:prstGeom>
+        </p:spPr>
+      </p:pic>
+      <p:sp>
+        <p:nvSpPr>
+          <p:cNvPr id="42" name="Text 35"/>
+          <p:cNvSpPr/>
+          <p:nvPr/>
+        </p:nvSpPr>
+        <p:spPr>
+          <a:xfrm>
+            <a:off x="1371600" y="27934920"/>
             <a:ext cx="10424160" cy="457200"/>
           </a:xfrm>
           <a:prstGeom prst="rect">
@@ -2206,7 +2496,7 @@
                 <a:ea typeface="Microsoft JhengHei" pitchFamily="34" charset="-122"/>
                 <a:cs typeface="Microsoft JhengHei" pitchFamily="34" charset="-120"/>
               </a:rPr>
-              <a:t>技能樹：左邊基礎、右邊進階，箭頭永遠是先修 → 進階。綠色＝已掌握、發光＝現在可以學、上鎖＝先修未完成。</a:t>
+              <a:t>我原本只想解決一門課。丟第二門、第三門進去之後，系統自己在課與課之間拉出了連結——沒有人教過它。</a:t>
             </a:r>
             <a:endParaRPr lang="en-US" sz="1400" dirty="0"/>
           </a:p>
@@ -2214,7 +2504,7 @@
       </p:sp>
       <p:sp>
         <p:nvSpPr>
-          <p:cNvPr id="35" name="Shape 30"/>
+          <p:cNvPr id="43" name="Shape 36"/>
           <p:cNvSpPr/>
           <p:nvPr/>
         </p:nvSpPr>
@@ -2239,7 +2529,7 @@
       </p:sp>
       <p:sp>
         <p:nvSpPr>
-          <p:cNvPr id="36" name="Text 31"/>
+          <p:cNvPr id="44" name="Text 37"/>
           <p:cNvSpPr/>
           <p:nvPr/>
         </p:nvSpPr>
@@ -2278,7 +2568,7 @@
       </p:sp>
       <p:sp>
         <p:nvSpPr>
-          <p:cNvPr id="37" name="Text 32"/>
+          <p:cNvPr id="45" name="Text 38"/>
           <p:cNvSpPr/>
           <p:nvPr/>
         </p:nvSpPr>
@@ -2320,7 +2610,7 @@
       </p:sp>
       <p:sp>
         <p:nvSpPr>
-          <p:cNvPr id="38" name="Shape 33"/>
+          <p:cNvPr id="46" name="Shape 39"/>
           <p:cNvSpPr/>
           <p:nvPr/>
         </p:nvSpPr>
@@ -2345,7 +2635,7 @@
       </p:sp>
       <p:sp>
         <p:nvSpPr>
-          <p:cNvPr id="39" name="Text 34"/>
+          <p:cNvPr id="47" name="Text 40"/>
           <p:cNvSpPr/>
           <p:nvPr/>
         </p:nvSpPr>
@@ -2384,7 +2674,7 @@
       </p:sp>
       <p:sp>
         <p:nvSpPr>
-          <p:cNvPr id="40" name="Text 35"/>
+          <p:cNvPr id="48" name="Text 41"/>
           <p:cNvSpPr/>
           <p:nvPr/>
         </p:nvSpPr>
@@ -2426,7 +2716,7 @@
       </p:sp>
       <p:sp>
         <p:nvSpPr>
-          <p:cNvPr id="41" name="Shape 36"/>
+          <p:cNvPr id="49" name="Shape 42"/>
           <p:cNvSpPr/>
           <p:nvPr/>
         </p:nvSpPr>
@@ -2451,7 +2741,7 @@
       </p:sp>
       <p:sp>
         <p:nvSpPr>
-          <p:cNvPr id="42" name="Text 37"/>
+          <p:cNvPr id="50" name="Text 43"/>
           <p:cNvSpPr/>
           <p:nvPr/>
         </p:nvSpPr>
@@ -2490,7 +2780,7 @@
       </p:sp>
       <p:sp>
         <p:nvSpPr>
-          <p:cNvPr id="43" name="Text 38"/>
+          <p:cNvPr id="51" name="Text 44"/>
           <p:cNvSpPr/>
           <p:nvPr/>
         </p:nvSpPr>
@@ -2532,7 +2822,7 @@
       </p:sp>
       <p:sp>
         <p:nvSpPr>
-          <p:cNvPr id="44" name="Shape 39"/>
+          <p:cNvPr id="52" name="Shape 45"/>
           <p:cNvSpPr/>
           <p:nvPr/>
         </p:nvSpPr>
@@ -2557,7 +2847,7 @@
       </p:sp>
       <p:sp>
         <p:nvSpPr>
-          <p:cNvPr id="45" name="Text 40"/>
+          <p:cNvPr id="53" name="Text 46"/>
           <p:cNvSpPr/>
           <p:nvPr/>
         </p:nvSpPr>
@@ -2596,7 +2886,7 @@
       </p:sp>
       <p:sp>
         <p:nvSpPr>
-          <p:cNvPr id="46" name="Text 41"/>
+          <p:cNvPr id="54" name="Text 47"/>
           <p:cNvSpPr/>
           <p:nvPr/>
         </p:nvSpPr>
@@ -2638,7 +2928,7 @@
       </p:sp>
       <p:sp>
         <p:nvSpPr>
-          <p:cNvPr id="47" name="Text 42"/>
+          <p:cNvPr id="55" name="Text 48"/>
           <p:cNvSpPr/>
           <p:nvPr/>
         </p:nvSpPr>
@@ -2700,7 +2990,7 @@
       </p:sp>
       <p:sp>
         <p:nvSpPr>
-          <p:cNvPr id="48" name="Text 43"/>
+          <p:cNvPr id="56" name="Text 49"/>
           <p:cNvSpPr/>
           <p:nvPr/>
         </p:nvSpPr>

--- a/AdaptLearn-海報-A1-v2.pptx
+++ b/AdaptLearn-海報-A1-v2.pptx
@@ -2394,7 +2394,7 @@
                 <a:ea typeface="Microsoft JhengHei" pitchFamily="34" charset="-122"/>
                 <a:cs typeface="Microsoft JhengHei" pitchFamily="34" charset="-120"/>
               </a:rPr>
-              <a:t>這 63 個概念、還有課與課之間的 37 條連結，沒有一個是我手動輸入的 —— 全部由這條管線跑出來。</a:t>
+              <a:t>這 63 個概念、還有課與課之間的 44 條連結，沒有一個是我手動輸入的 —— 全部由這條管線跑出來。</a:t>
             </a:r>
             <a:endParaRPr lang="en-US" sz="1500" dirty="0"/>
           </a:p>
@@ -2814,7 +2814,7 @@
                 <a:ea typeface="Microsoft JhengHei" pitchFamily="34" charset="-122"/>
                 <a:cs typeface="Microsoft JhengHei" pitchFamily="34" charset="-120"/>
               </a:rPr>
-              <a:t>手寫講義的「單範正交集」與另一門課的「正交集合」被判為等價概念，相似度 87%。共 37 條連結。</a:t>
+              <a:t>手寫講義的「單範正交集」與另一門課的「正交集合」被判為等價概念，相似度 87%。畫面上這門課相關 37 條，全部 4 門課共 44 條。</a:t>
             </a:r>
             <a:endParaRPr lang="en-US" sz="1400" dirty="0"/>
           </a:p>
@@ -2982,7 +2982,7 @@
                 <a:ea typeface="Microsoft JhengHei" pitchFamily="34" charset="-122"/>
                 <a:cs typeface="Microsoft JhengHei" pitchFamily="34" charset="-120"/>
               </a:rPr>
-              <a:t>105 / 110 自動化測試通過　·　37 條跨課程連結</a:t>
+              <a:t>105 / 110 自動化測試通過　·　44 條跨課程連結</a:t>
             </a:r>
             <a:endParaRPr lang="en-US" sz="1450" dirty="0"/>
           </a:p>
